--- a/builder/assets/reference-pages/scenario-planning.pptx
+++ b/builder/assets/reference-pages/scenario-planning.pptx
@@ -1231,7 +1231,7 @@
                   <a:srgbClr val="15375F"/>
                 </a:solidFill>
               </a:rPr>
-              <a:t>三种情景下都需先做的四件事，构成无悔举措</a:t>
+              <a:t>Four things you need to do first in all three situations to form a no-regrets move</a:t>
             </a:r>
           </a:p>
         </p:txBody>
@@ -1316,7 +1316,7 @@
                   <a:srgbClr val="15375F"/>
                 </a:solidFill>
               </a:rPr>
-              <a:t>悲观情景｜25%</a:t>
+              <a:t>pessimistic scenario｜25%</a:t>
             </a:r>
           </a:p>
         </p:txBody>
@@ -1366,7 +1366,7 @@
                   <a:srgbClr val="172033"/>
                 </a:solidFill>
               </a:rPr>
-              <a:t>关键假设</a:t>
+              <a:t>key assumptions</a:t>
             </a:r>
           </a:p>
           <a:p xmlns:a="http://schemas.openxmlformats.org/drawingml/2006/main">
@@ -1383,7 +1383,7 @@
                   <a:srgbClr val="172033"/>
                 </a:solidFill>
               </a:rPr>
-              <a:t>政策支持延后；需求减少</a:t>
+              <a:t>Policy support delayed; demand reduced</a:t>
             </a:r>
           </a:p>
         </p:txBody>
@@ -1437,7 +1437,7 @@
                   <a:srgbClr val="172033"/>
                 </a:solidFill>
               </a:rPr>
-              <a:t>核心指标</a:t>
+              <a:t>core indicators</a:t>
             </a:r>
           </a:p>
           <a:p xmlns:a="http://schemas.openxmlformats.org/drawingml/2006/main">
@@ -1454,7 +1454,7 @@
                   <a:srgbClr val="172033"/>
                 </a:solidFill>
               </a:rPr>
-              <a:t>市场增速 -5%   客户预算 -12%   项目毛利 16%</a:t>
+              <a:t>Market growth rate -5%   client budget -12%   Project gross profit 16%</a:t>
             </a:r>
           </a:p>
         </p:txBody>
@@ -1504,7 +1504,7 @@
                   <a:srgbClr val="172033"/>
                 </a:solidFill>
               </a:rPr>
-              <a:t>业务影响</a:t>
+              <a:t>business impact</a:t>
             </a:r>
           </a:p>
           <a:p xmlns:a="http://schemas.openxmlformats.org/drawingml/2006/main">
@@ -1521,7 +1521,7 @@
                   <a:srgbClr val="172033"/>
                 </a:solidFill>
               </a:rPr>
-              <a:t>新增项目减少</a:t>
+              <a:t>Fewer new projects</a:t>
             </a:r>
           </a:p>
         </p:txBody>
@@ -1571,7 +1571,7 @@
                   <a:srgbClr val="172033"/>
                 </a:solidFill>
               </a:rPr>
-              <a:t>领先指标</a:t>
+              <a:t>leading indicators</a:t>
             </a:r>
           </a:p>
           <a:p xmlns:a="http://schemas.openxmlformats.org/drawingml/2006/main">
@@ -1588,7 +1588,7 @@
                   <a:srgbClr val="172033"/>
                 </a:solidFill>
               </a:rPr>
-              <a:t>销售管道低于 70%</a:t>
+              <a:t>sales pipeline below 70%</a:t>
             </a:r>
           </a:p>
         </p:txBody>
@@ -1638,7 +1638,7 @@
                   <a:srgbClr val="172033"/>
                 </a:solidFill>
               </a:rPr>
-              <a:t>应对策略</a:t>
+              <a:t>coping strategies</a:t>
             </a:r>
           </a:p>
           <a:p xmlns:a="http://schemas.openxmlformats.org/drawingml/2006/main">
@@ -1655,7 +1655,7 @@
                   <a:srgbClr val="172033"/>
                 </a:solidFill>
               </a:rPr>
-              <a:t>保现金并聚焦高确定性客户</a:t>
+              <a:t>Preserve cash and focus on high-certainty customers</a:t>
             </a:r>
           </a:p>
         </p:txBody>
@@ -1740,7 +1740,7 @@
                   <a:srgbClr val="15375F"/>
                 </a:solidFill>
               </a:rPr>
-              <a:t>基准情景｜55%</a:t>
+              <a:t>Baseline scenario｜55%</a:t>
             </a:r>
           </a:p>
         </p:txBody>
@@ -1790,7 +1790,7 @@
                   <a:srgbClr val="172033"/>
                 </a:solidFill>
               </a:rPr>
-              <a:t>关键假设</a:t>
+              <a:t>key assumptions</a:t>
             </a:r>
           </a:p>
           <a:p xmlns:a="http://schemas.openxmlformats.org/drawingml/2006/main">
@@ -1807,7 +1807,7 @@
                   <a:srgbClr val="172033"/>
                 </a:solidFill>
               </a:rPr>
-              <a:t>政策渐进落地；需求温和恢复</a:t>
+              <a:t>Policies are gradually implemented; demand recovers moderately</a:t>
             </a:r>
           </a:p>
         </p:txBody>
@@ -1861,7 +1861,7 @@
                   <a:srgbClr val="172033"/>
                 </a:solidFill>
               </a:rPr>
-              <a:t>核心指标</a:t>
+              <a:t>core indicators</a:t>
             </a:r>
           </a:p>
           <a:p xmlns:a="http://schemas.openxmlformats.org/drawingml/2006/main">
@@ -1878,7 +1878,7 @@
                   <a:srgbClr val="172033"/>
                 </a:solidFill>
               </a:rPr>
-              <a:t>市场增速 +8%   客户预算 +5%   项目毛利 22%</a:t>
+              <a:t>Market growth rate +8%   client budget +5%   Project gross profit 22%</a:t>
             </a:r>
           </a:p>
         </p:txBody>
@@ -1928,7 +1928,7 @@
                   <a:srgbClr val="172033"/>
                 </a:solidFill>
               </a:rPr>
-              <a:t>业务影响</a:t>
+              <a:t>business impact</a:t>
             </a:r>
           </a:p>
           <a:p xmlns:a="http://schemas.openxmlformats.org/drawingml/2006/main">
@@ -1945,7 +1945,7 @@
                   <a:srgbClr val="172033"/>
                 </a:solidFill>
               </a:rPr>
-              <a:t>需求稳步恢复</a:t>
+              <a:t>Demand recovers steadily</a:t>
             </a:r>
           </a:p>
         </p:txBody>
@@ -1995,7 +1995,7 @@
                   <a:srgbClr val="172033"/>
                 </a:solidFill>
               </a:rPr>
-              <a:t>领先指标</a:t>
+              <a:t>leading indicators</a:t>
             </a:r>
           </a:p>
           <a:p xmlns:a="http://schemas.openxmlformats.org/drawingml/2006/main">
@@ -2012,7 +2012,7 @@
                   <a:srgbClr val="172033"/>
                 </a:solidFill>
               </a:rPr>
-              <a:t>销售管道为目标 90%–110%</a:t>
+              <a:t>sales pipeline target 90%–110%</a:t>
             </a:r>
           </a:p>
         </p:txBody>
@@ -2062,7 +2062,7 @@
                   <a:srgbClr val="172033"/>
                 </a:solidFill>
               </a:rPr>
-              <a:t>应对策略</a:t>
+              <a:t>coping strategies</a:t>
             </a:r>
           </a:p>
           <a:p xmlns:a="http://schemas.openxmlformats.org/drawingml/2006/main">
@@ -2079,7 +2079,7 @@
                   <a:srgbClr val="172033"/>
                 </a:solidFill>
               </a:rPr>
-              <a:t>复制标准方案</a:t>
+              <a:t>Copy standard scheme</a:t>
             </a:r>
           </a:p>
         </p:txBody>
@@ -2164,7 +2164,7 @@
                   <a:srgbClr val="E8872D"/>
                 </a:solidFill>
               </a:rPr>
-              <a:t>乐观情景｜20%</a:t>
+              <a:t>optimistic scenario｜20%</a:t>
             </a:r>
           </a:p>
         </p:txBody>
@@ -2214,7 +2214,7 @@
                   <a:srgbClr val="172033"/>
                 </a:solidFill>
               </a:rPr>
-              <a:t>关键假设</a:t>
+              <a:t>key assumptions</a:t>
             </a:r>
           </a:p>
           <a:p xmlns:a="http://schemas.openxmlformats.org/drawingml/2006/main">
@@ -2231,7 +2231,7 @@
                   <a:srgbClr val="172033"/>
                 </a:solidFill>
               </a:rPr>
-              <a:t>政策激励加速；需求集中释放</a:t>
+              <a:t>Policy incentives are accelerating; demand is concentrated and released</a:t>
             </a:r>
           </a:p>
         </p:txBody>
@@ -2285,7 +2285,7 @@
                   <a:srgbClr val="172033"/>
                 </a:solidFill>
               </a:rPr>
-              <a:t>核心指标</a:t>
+              <a:t>core indicators</a:t>
             </a:r>
           </a:p>
           <a:p xmlns:a="http://schemas.openxmlformats.org/drawingml/2006/main">
@@ -2302,7 +2302,7 @@
                   <a:srgbClr val="172033"/>
                 </a:solidFill>
               </a:rPr>
-              <a:t>市场增速 +20%   客户预算 +18%   项目毛利 28%</a:t>
+              <a:t>Market growth rate +20%   client budget +18%   Project gross profit 28%</a:t>
             </a:r>
           </a:p>
         </p:txBody>
@@ -2352,7 +2352,7 @@
                   <a:srgbClr val="172033"/>
                 </a:solidFill>
               </a:rPr>
-              <a:t>业务影响</a:t>
+              <a:t>business impact</a:t>
             </a:r>
           </a:p>
           <a:p xmlns:a="http://schemas.openxmlformats.org/drawingml/2006/main">
@@ -2369,7 +2369,7 @@
                   <a:srgbClr val="172033"/>
                 </a:solidFill>
               </a:rPr>
-              <a:t>订单快速增长</a:t>
+              <a:t>Orders grow rapidly</a:t>
             </a:r>
           </a:p>
         </p:txBody>
@@ -2419,7 +2419,7 @@
                   <a:srgbClr val="172033"/>
                 </a:solidFill>
               </a:rPr>
-              <a:t>领先指标</a:t>
+              <a:t>leading indicators</a:t>
             </a:r>
           </a:p>
           <a:p xmlns:a="http://schemas.openxmlformats.org/drawingml/2006/main">
@@ -2436,7 +2436,7 @@
                   <a:srgbClr val="172033"/>
                 </a:solidFill>
               </a:rPr>
-              <a:t>销售管道超过 130%</a:t>
+              <a:t>Sales pipeline exceeds 130%</a:t>
             </a:r>
           </a:p>
         </p:txBody>
@@ -2486,7 +2486,7 @@
                   <a:srgbClr val="172033"/>
                 </a:solidFill>
               </a:rPr>
-              <a:t>应对策略</a:t>
+              <a:t>coping strategies</a:t>
             </a:r>
           </a:p>
           <a:p xmlns:a="http://schemas.openxmlformats.org/drawingml/2006/main">
@@ -2503,7 +2503,7 @@
                   <a:srgbClr val="172033"/>
                 </a:solidFill>
               </a:rPr>
-              <a:t>提前锁定产能</a:t>
+              <a:t>Lock in production capacity in advance</a:t>
             </a:r>
           </a:p>
         </p:txBody>
@@ -2559,7 +2559,7 @@
                   <a:srgbClr val="FFFFFF"/>
                 </a:solidFill>
               </a:rPr>
-              <a:t>无悔举措：统一数据口径、标准化方案、储备关键人才、滚动监测领先指标</a:t>
+              <a:t>No-regret measures: unified data caliber, standardized plan, reserve key talents, rolling monitoring of leading indicators</a:t>
             </a:r>
           </a:p>
         </p:txBody>
@@ -2615,7 +2615,7 @@
                   <a:srgbClr val="E8872D"/>
                 </a:solidFill>
               </a:rPr>
-              <a:t>若销售管道低于 70% 或超过 130%，启动弹性资源方案</a:t>
+              <a:t>If the sales pipeline is below 70% or exceed 130%, start the flexible resource plan</a:t>
             </a:r>
           </a:p>
         </p:txBody>
